--- a/Related Work/Our Work/Research PPT.pptx
+++ b/Related Work/Our Work/Research PPT.pptx
@@ -1085,7 +1085,7 @@
           <a:p>
             <a:fld id="{7FF95820-84BB-3447-8286-60A51307E7F2}" type="datetimeFigureOut">
               <a:rPr lang="en-US" smtClean="0"/>
-              <a:t>12/31/2025</a:t>
+              <a:t>1/1/2026</a:t>
             </a:fld>
             <a:endParaRPr lang="en-US" dirty="0"/>
           </a:p>
@@ -1263,7 +1263,7 @@
           <a:p>
             <a:fld id="{FC08FC54-6AE4-6A4A-9756-823A0F1BE5A6}" type="datetimeFigureOut">
               <a:rPr lang="en-US" smtClean="0"/>
-              <a:t>12/31/2025</a:t>
+              <a:t>1/1/2026</a:t>
             </a:fld>
             <a:endParaRPr lang="en-US" dirty="0"/>
           </a:p>
@@ -12515,6 +12515,17 @@
           </a:p>
           <a:p>
             <a:r>
+              <a:rPr lang="en-IN">
+                <a:solidFill>
+                  <a:schemeClr val="tx1"/>
+                </a:solidFill>
+                <a:latin typeface="Calibri" panose="020F0502020204030204" pitchFamily="34" charset="0"/>
+                <a:ea typeface="Calibri" panose="020F0502020204030204" pitchFamily="34" charset="0"/>
+                <a:cs typeface="Calibri" panose="020F0502020204030204" pitchFamily="34" charset="0"/>
+              </a:rPr>
+              <a:t>Assistant Professor</a:t>
+            </a:r>
+            <a:r>
               <a:rPr lang="en-IN" dirty="0">
                 <a:solidFill>
                   <a:schemeClr val="tx1"/>
@@ -12523,7 +12534,7 @@
                 <a:ea typeface="Calibri" panose="020F0502020204030204" pitchFamily="34" charset="0"/>
                 <a:cs typeface="Calibri" panose="020F0502020204030204" pitchFamily="34" charset="0"/>
               </a:rPr>
-              <a:t>Professor, </a:t>
+              <a:t>, </a:t>
             </a:r>
             <a:r>
               <a:rPr lang="en-IN" dirty="0" err="1">
@@ -19830,6 +19841,15 @@
 </file>
 
 <file path=customXml/item2.xml><?xml version="1.0" encoding="utf-8"?>
+<?mso-contentType ?>
+<FormTemplates xmlns="http://schemas.microsoft.com/sharepoint/v3/contenttype/forms">
+  <Display>DocumentLibraryForm</Display>
+  <Edit>DocumentLibraryForm</Edit>
+  <New>DocumentLibraryForm</New>
+</FormTemplates>
+</file>
+
+<file path=customXml/item3.xml><?xml version="1.0" encoding="utf-8"?>
 <ct:contentTypeSchema xmlns:ct="http://schemas.microsoft.com/office/2006/metadata/contentType" xmlns:ma="http://schemas.microsoft.com/office/2006/metadata/properties/metaAttributes" ct:_="" ma:_="" ma:contentTypeName="Document" ma:contentTypeID="0x01010079F111ED35F8CC479449609E8A0923A6" ma:contentTypeVersion="25" ma:contentTypeDescription="Create a new document." ma:contentTypeScope="" ma:versionID="e02306daf00165b375dc6a58966960be">
   <xsd:schema xmlns:xsd="http://www.w3.org/2001/XMLSchema" xmlns:xs="http://www.w3.org/2001/XMLSchema" xmlns:p="http://schemas.microsoft.com/office/2006/metadata/properties" xmlns:ns1="http://schemas.microsoft.com/sharepoint/v3" xmlns:ns2="71af3243-3dd4-4a8d-8c0d-dd76da1f02a5" xmlns:ns3="16c05727-aa75-4e4a-9b5f-8a80a1165891" xmlns:ns4="230e9df3-be65-4c73-a93b-d1236ebd677e" targetNamespace="http://schemas.microsoft.com/office/2006/metadata/properties" ma:root="true" ma:fieldsID="df88fb76bf5f555224557953949c1ec9" ns1:_="" ns2:_="" ns3:_="" ns4:_="">
     <xsd:import namespace="http://schemas.microsoft.com/sharepoint/v3"/>
@@ -20123,15 +20143,6 @@
 </ct:contentTypeSchema>
 </file>
 
-<file path=customXml/item3.xml><?xml version="1.0" encoding="utf-8"?>
-<?mso-contentType ?>
-<FormTemplates xmlns="http://schemas.microsoft.com/sharepoint/v3/contenttype/forms">
-  <Display>DocumentLibraryForm</Display>
-  <Edit>DocumentLibraryForm</Edit>
-  <New>DocumentLibraryForm</New>
-</FormTemplates>
-</file>
-
 <file path=customXml/itemProps1.xml><?xml version="1.0" encoding="utf-8"?>
 <ds:datastoreItem xmlns:ds="http://schemas.openxmlformats.org/officeDocument/2006/customXml" ds:itemID="{99746342-5E84-430E-9251-61001F208E7A}">
   <ds:schemaRefs>
@@ -20145,6 +20156,14 @@
 </file>
 
 <file path=customXml/itemProps2.xml><?xml version="1.0" encoding="utf-8"?>
+<ds:datastoreItem xmlns:ds="http://schemas.openxmlformats.org/officeDocument/2006/customXml" ds:itemID="{0E8B3377-22F1-4153-96F0-CC2E4BE41C57}">
+  <ds:schemaRefs>
+    <ds:schemaRef ds:uri="http://schemas.microsoft.com/sharepoint/v3/contenttype/forms"/>
+  </ds:schemaRefs>
+</ds:datastoreItem>
+</file>
+
+<file path=customXml/itemProps3.xml><?xml version="1.0" encoding="utf-8"?>
 <ds:datastoreItem xmlns:ds="http://schemas.openxmlformats.org/officeDocument/2006/customXml" ds:itemID="{2EB2FABB-45EC-440E-B647-8CA57BA45ACA}">
   <ds:schemaRefs>
     <ds:schemaRef ds:uri="http://schemas.microsoft.com/office/2006/metadata/contentType"/>
@@ -20165,14 +20184,6 @@
 </ds:datastoreItem>
 </file>
 
-<file path=customXml/itemProps3.xml><?xml version="1.0" encoding="utf-8"?>
-<ds:datastoreItem xmlns:ds="http://schemas.openxmlformats.org/officeDocument/2006/customXml" ds:itemID="{0E8B3377-22F1-4153-96F0-CC2E4BE41C57}">
-  <ds:schemaRefs>
-    <ds:schemaRef ds:uri="http://schemas.microsoft.com/sharepoint/v3/contenttype/forms"/>
-  </ds:schemaRefs>
-</ds:datastoreItem>
-</file>
-
 <file path=docMetadata/LabelInfo.xml><?xml version="1.0" encoding="utf-8"?>
 <clbl:labelList xmlns:clbl="http://schemas.microsoft.com/office/2020/mipLabelMetadata"/>
 </file>
--- a/Related Work/Our Work/Research PPT.pptx
+++ b/Related Work/Our Work/Research PPT.pptx
@@ -5,10 +5,10 @@
     <p:sldMasterId id="2147483648" r:id="rId4"/>
   </p:sldMasterIdLst>
   <p:notesMasterIdLst>
-    <p:notesMasterId r:id="rId26"/>
+    <p:notesMasterId r:id="rId25"/>
   </p:notesMasterIdLst>
   <p:handoutMasterIdLst>
-    <p:handoutMasterId r:id="rId27"/>
+    <p:handoutMasterId r:id="rId26"/>
   </p:handoutMasterIdLst>
   <p:sldIdLst>
     <p:sldId id="325" r:id="rId5"/>
@@ -22,16 +22,15 @@
     <p:sldId id="329" r:id="rId13"/>
     <p:sldId id="348" r:id="rId14"/>
     <p:sldId id="349" r:id="rId15"/>
-    <p:sldId id="350" r:id="rId16"/>
-    <p:sldId id="351" r:id="rId17"/>
-    <p:sldId id="353" r:id="rId18"/>
-    <p:sldId id="352" r:id="rId19"/>
-    <p:sldId id="343" r:id="rId20"/>
-    <p:sldId id="337" r:id="rId21"/>
-    <p:sldId id="338" r:id="rId22"/>
-    <p:sldId id="356" r:id="rId23"/>
-    <p:sldId id="355" r:id="rId24"/>
-    <p:sldId id="358" r:id="rId25"/>
+    <p:sldId id="351" r:id="rId16"/>
+    <p:sldId id="353" r:id="rId17"/>
+    <p:sldId id="352" r:id="rId18"/>
+    <p:sldId id="343" r:id="rId19"/>
+    <p:sldId id="337" r:id="rId20"/>
+    <p:sldId id="338" r:id="rId21"/>
+    <p:sldId id="356" r:id="rId22"/>
+    <p:sldId id="355" r:id="rId23"/>
+    <p:sldId id="358" r:id="rId24"/>
   </p:sldIdLst>
   <p:sldSz cx="12192000" cy="6858000"/>
   <p:notesSz cx="6858000" cy="9144000"/>
@@ -1085,7 +1084,7 @@
           <a:p>
             <a:fld id="{7FF95820-84BB-3447-8286-60A51307E7F2}" type="datetimeFigureOut">
               <a:rPr lang="en-US" smtClean="0"/>
-              <a:t>1/1/2026</a:t>
+              <a:t>1/6/2026</a:t>
             </a:fld>
             <a:endParaRPr lang="en-US" dirty="0"/>
           </a:p>
@@ -1263,7 +1262,7 @@
           <a:p>
             <a:fld id="{FC08FC54-6AE4-6A4A-9756-823A0F1BE5A6}" type="datetimeFigureOut">
               <a:rPr lang="en-US" smtClean="0"/>
-              <a:t>1/1/2026</a:t>
+              <a:t>1/6/2026</a:t>
             </a:fld>
             <a:endParaRPr lang="en-US" dirty="0"/>
           </a:p>
@@ -12658,7 +12657,7 @@
           <a:p>
             <a:r>
               <a:rPr lang="en-US" sz="4400" dirty="0"/>
-              <a:t>Proposed </a:t>
+              <a:t>RESEARCH </a:t>
             </a:r>
             <a:br>
               <a:rPr lang="en-US" sz="4400" dirty="0"/>
@@ -13041,173 +13040,6 @@
         <p:cNvPr id="1" name="">
           <a:extLst>
             <a:ext uri="{FF2B5EF4-FFF2-40B4-BE49-F238E27FC236}">
-              <a16:creationId xmlns:a16="http://schemas.microsoft.com/office/drawing/2014/main" id="{FC1705CA-689C-32DF-308F-B3706D899967}"/>
-            </a:ext>
-          </a:extLst>
-        </p:cNvPr>
-        <p:cNvGrpSpPr/>
-        <p:nvPr/>
-      </p:nvGrpSpPr>
-      <p:grpSpPr>
-        <a:xfrm>
-          <a:off x="0" y="0"/>
-          <a:ext cx="0" cy="0"/>
-          <a:chOff x="0" y="0"/>
-          <a:chExt cx="0" cy="0"/>
-        </a:xfrm>
-      </p:grpSpPr>
-      <p:sp>
-        <p:nvSpPr>
-          <p:cNvPr id="4" name="Slide Number Placeholder 3">
-            <a:extLst>
-              <a:ext uri="{FF2B5EF4-FFF2-40B4-BE49-F238E27FC236}">
-                <a16:creationId xmlns:a16="http://schemas.microsoft.com/office/drawing/2014/main" id="{2EB2AB0B-CFED-0C73-5F17-D2CED230A0E5}"/>
-              </a:ext>
-            </a:extLst>
-          </p:cNvPr>
-          <p:cNvSpPr>
-            <a:spLocks noGrp="1"/>
-          </p:cNvSpPr>
-          <p:nvPr>
-            <p:ph type="sldNum" sz="quarter" idx="11"/>
-          </p:nvPr>
-        </p:nvSpPr>
-        <p:spPr/>
-        <p:txBody>
-          <a:bodyPr/>
-          <a:lstStyle/>
-          <a:p>
-            <a:fld id="{75DF2D63-3FF5-D547-96B9-BE9CCD1ABA58}" type="slidenum">
-              <a:rPr lang="en-US" smtClean="0"/>
-              <a:pPr/>
-              <a:t>12</a:t>
-            </a:fld>
-            <a:endParaRPr lang="en-US" dirty="0"/>
-          </a:p>
-        </p:txBody>
-      </p:sp>
-      <p:sp>
-        <p:nvSpPr>
-          <p:cNvPr id="17" name="TextBox 16">
-            <a:extLst>
-              <a:ext uri="{FF2B5EF4-FFF2-40B4-BE49-F238E27FC236}">
-                <a16:creationId xmlns:a16="http://schemas.microsoft.com/office/drawing/2014/main" id="{F0BD413D-AEAF-C8B3-AA9E-CFEE6FE49239}"/>
-              </a:ext>
-            </a:extLst>
-          </p:cNvPr>
-          <p:cNvSpPr txBox="1"/>
-          <p:nvPr/>
-        </p:nvSpPr>
-        <p:spPr>
-          <a:xfrm>
-            <a:off x="3010273" y="805292"/>
-            <a:ext cx="6171454" cy="594137"/>
-          </a:xfrm>
-          <a:prstGeom prst="rect">
-            <a:avLst/>
-          </a:prstGeom>
-          <a:noFill/>
-        </p:spPr>
-        <p:txBody>
-          <a:bodyPr wrap="square">
-            <a:spAutoFit/>
-          </a:bodyPr>
-          <a:lstStyle/>
-          <a:p>
-            <a:pPr marR="0" lvl="0" algn="ctr" defTabSz="914400" rtl="0" eaLnBrk="1" fontAlgn="auto" latinLnBrk="0" hangingPunct="1">
-              <a:lnSpc>
-                <a:spcPct val="90000"/>
-              </a:lnSpc>
-              <a:spcBef>
-                <a:spcPts val="1000"/>
-              </a:spcBef>
-              <a:spcAft>
-                <a:spcPts val="0"/>
-              </a:spcAft>
-              <a:buClrTx/>
-              <a:buSzTx/>
-              <a:tabLst/>
-              <a:defRPr/>
-            </a:pPr>
-            <a:r>
-              <a:rPr lang="en-US" sz="3600" dirty="0">
-                <a:solidFill>
-                  <a:prstClr val="black"/>
-                </a:solidFill>
-                <a:latin typeface="Aptos" panose="020B0004020202020204" pitchFamily="34" charset="0"/>
-                <a:ea typeface="Open Sans Semibold" panose="020B0706030804020204" pitchFamily="34" charset="0"/>
-                <a:cs typeface="Open Sans Semibold" panose="020B0706030804020204" pitchFamily="34" charset="0"/>
-              </a:rPr>
-              <a:t>ML ARCHITECTURE</a:t>
-            </a:r>
-            <a:endParaRPr kumimoji="0" lang="en-US" sz="3600" i="0" u="none" strike="noStrike" kern="1200" cap="none" spc="0" normalizeH="0" baseline="0" noProof="0" dirty="0">
-              <a:ln>
-                <a:noFill/>
-              </a:ln>
-              <a:solidFill>
-                <a:prstClr val="black"/>
-              </a:solidFill>
-              <a:effectLst/>
-              <a:uLnTx/>
-              <a:uFillTx/>
-              <a:latin typeface="Aptos" panose="020B0004020202020204" pitchFamily="34" charset="0"/>
-              <a:ea typeface="Open Sans Semibold" panose="020B0706030804020204" pitchFamily="34" charset="0"/>
-              <a:cs typeface="Open Sans Semibold" panose="020B0706030804020204" pitchFamily="34" charset="0"/>
-            </a:endParaRPr>
-          </a:p>
-        </p:txBody>
-      </p:sp>
-      <p:pic>
-        <p:nvPicPr>
-          <p:cNvPr id="3" name="Picture 2" descr="A diagram of a computer model&#10;&#10;AI-generated content may be incorrect.">
-            <a:extLst>
-              <a:ext uri="{FF2B5EF4-FFF2-40B4-BE49-F238E27FC236}">
-                <a16:creationId xmlns:a16="http://schemas.microsoft.com/office/drawing/2014/main" id="{E50859BA-7726-1230-CB90-7B9C16761CC8}"/>
-              </a:ext>
-            </a:extLst>
-          </p:cNvPr>
-          <p:cNvPicPr>
-            <a:picLocks noChangeAspect="1"/>
-          </p:cNvPicPr>
-          <p:nvPr/>
-        </p:nvPicPr>
-        <p:blipFill>
-          <a:blip r:embed="rId2"/>
-          <a:stretch>
-            <a:fillRect/>
-          </a:stretch>
-        </p:blipFill>
-        <p:spPr>
-          <a:xfrm>
-            <a:off x="2860894" y="1722737"/>
-            <a:ext cx="6721821" cy="4481214"/>
-          </a:xfrm>
-          <a:prstGeom prst="rect">
-            <a:avLst/>
-          </a:prstGeom>
-        </p:spPr>
-      </p:pic>
-    </p:spTree>
-    <p:extLst>
-      <p:ext uri="{BB962C8B-B14F-4D97-AF65-F5344CB8AC3E}">
-        <p14:creationId xmlns:p14="http://schemas.microsoft.com/office/powerpoint/2010/main" val="542816085"/>
-      </p:ext>
-    </p:extLst>
-  </p:cSld>
-  <p:clrMapOvr>
-    <a:masterClrMapping/>
-  </p:clrMapOvr>
-</p:sld>
-</file>
-
-<file path=ppt/slides/slide13.xml><?xml version="1.0" encoding="utf-8"?>
-<p:sld xmlns:a="http://schemas.openxmlformats.org/drawingml/2006/main" xmlns:r="http://schemas.openxmlformats.org/officeDocument/2006/relationships" xmlns:p="http://schemas.openxmlformats.org/presentationml/2006/main">
-  <p:cSld>
-    <p:spTree>
-      <p:nvGrpSpPr>
-        <p:cNvPr id="1" name="">
-          <a:extLst>
-            <a:ext uri="{FF2B5EF4-FFF2-40B4-BE49-F238E27FC236}">
               <a16:creationId xmlns:a16="http://schemas.microsoft.com/office/drawing/2014/main" id="{5C096B58-52AD-199C-434E-110E2F75964E}"/>
             </a:ext>
           </a:extLst>
@@ -13247,7 +13079,7 @@
             <a:fld id="{75DF2D63-3FF5-D547-96B9-BE9CCD1ABA58}" type="slidenum">
               <a:rPr lang="en-US" smtClean="0"/>
               <a:pPr/>
-              <a:t>13</a:t>
+              <a:t>12</a:t>
             </a:fld>
             <a:endParaRPr lang="en-US" dirty="0"/>
           </a:p>
@@ -13457,7 +13289,7 @@
 </p:sld>
 </file>
 
-<file path=ppt/slides/slide14.xml><?xml version="1.0" encoding="utf-8"?>
+<file path=ppt/slides/slide13.xml><?xml version="1.0" encoding="utf-8"?>
 <p:sld xmlns:a="http://schemas.openxmlformats.org/drawingml/2006/main" xmlns:r="http://schemas.openxmlformats.org/officeDocument/2006/relationships" xmlns:p="http://schemas.openxmlformats.org/presentationml/2006/main">
   <p:cSld>
     <p:spTree>
@@ -13504,7 +13336,7 @@
             <a:fld id="{75DF2D63-3FF5-D547-96B9-BE9CCD1ABA58}" type="slidenum">
               <a:rPr lang="en-US" smtClean="0"/>
               <a:pPr/>
-              <a:t>14</a:t>
+              <a:t>13</a:t>
             </a:fld>
             <a:endParaRPr lang="en-US" dirty="0"/>
           </a:p>
@@ -13714,7 +13546,7 @@
 </p:sld>
 </file>
 
-<file path=ppt/slides/slide15.xml><?xml version="1.0" encoding="utf-8"?>
+<file path=ppt/slides/slide14.xml><?xml version="1.0" encoding="utf-8"?>
 <p:sld xmlns:a="http://schemas.openxmlformats.org/drawingml/2006/main" xmlns:r="http://schemas.openxmlformats.org/officeDocument/2006/relationships" xmlns:p="http://schemas.openxmlformats.org/presentationml/2006/main">
   <p:cSld>
     <p:spTree>
@@ -13761,7 +13593,7 @@
             <a:fld id="{75DF2D63-3FF5-D547-96B9-BE9CCD1ABA58}" type="slidenum">
               <a:rPr lang="en-US" smtClean="0"/>
               <a:pPr/>
-              <a:t>15</a:t>
+              <a:t>14</a:t>
             </a:fld>
             <a:endParaRPr lang="en-US" dirty="0"/>
           </a:p>
@@ -14566,7 +14398,7 @@
 </p:sld>
 </file>
 
-<file path=ppt/slides/slide16.xml><?xml version="1.0" encoding="utf-8"?>
+<file path=ppt/slides/slide15.xml><?xml version="1.0" encoding="utf-8"?>
 <p:sld xmlns:a="http://schemas.openxmlformats.org/drawingml/2006/main" xmlns:r="http://schemas.openxmlformats.org/officeDocument/2006/relationships" xmlns:p="http://schemas.openxmlformats.org/presentationml/2006/main">
   <p:cSld>
     <p:spTree>
@@ -14633,7 +14465,7 @@
           <p:nvPr>
             <p:extLst>
               <p:ext uri="{D42A27DB-BD31-4B8C-83A1-F6EECF244321}">
-                <p14:modId xmlns:p14="http://schemas.microsoft.com/office/powerpoint/2010/main" val="710811062"/>
+                <p14:modId xmlns:p14="http://schemas.microsoft.com/office/powerpoint/2010/main" val="3924906411"/>
               </p:ext>
             </p:extLst>
           </p:nvPr>
@@ -15346,18 +15178,6 @@
                       <a:pPr algn="ctr" fontAlgn="b">
                         <a:buNone/>
                       </a:pPr>
-                      <a:r>
-                        <a:rPr lang="en-IN" sz="1600" b="0" u="none" strike="noStrike" dirty="0">
-                          <a:solidFill>
-                            <a:srgbClr val="000000"/>
-                          </a:solidFill>
-                          <a:effectLst/>
-                          <a:latin typeface="Calibri" panose="020F0502020204030204" pitchFamily="34" charset="0"/>
-                          <a:ea typeface="Calibri" panose="020F0502020204030204" pitchFamily="34" charset="0"/>
-                          <a:cs typeface="Calibri" panose="020F0502020204030204" pitchFamily="34" charset="0"/>
-                        </a:rPr>
-                        <a:t>Model Export</a:t>
-                      </a:r>
                       <a:endParaRPr lang="en-IN" sz="1600" b="0" i="0" u="none" strike="noStrike" dirty="0">
                         <a:solidFill>
                           <a:srgbClr val="000000"/>
@@ -15379,18 +15199,6 @@
                       <a:pPr algn="l" fontAlgn="b">
                         <a:buNone/>
                       </a:pPr>
-                      <a:r>
-                        <a:rPr lang="en-US" sz="1600" b="0" u="none" strike="noStrike" dirty="0">
-                          <a:solidFill>
-                            <a:srgbClr val="000000"/>
-                          </a:solidFill>
-                          <a:effectLst/>
-                          <a:latin typeface="Calibri" panose="020F0502020204030204" pitchFamily="34" charset="0"/>
-                          <a:ea typeface="Calibri" panose="020F0502020204030204" pitchFamily="34" charset="0"/>
-                          <a:cs typeface="Calibri" panose="020F0502020204030204" pitchFamily="34" charset="0"/>
-                        </a:rPr>
-                        <a:t>Trained model exported in ONNX format</a:t>
-                      </a:r>
                       <a:endParaRPr lang="en-US" sz="1600" b="0" i="0" u="none" strike="noStrike" dirty="0">
                         <a:solidFill>
                           <a:srgbClr val="000000"/>
@@ -15427,7 +15235,7 @@
 </p:sld>
 </file>
 
-<file path=ppt/slides/slide17.xml><?xml version="1.0" encoding="utf-8"?>
+<file path=ppt/slides/slide16.xml><?xml version="1.0" encoding="utf-8"?>
 <p:sld xmlns:a="http://schemas.openxmlformats.org/drawingml/2006/main" xmlns:r="http://schemas.openxmlformats.org/officeDocument/2006/relationships" xmlns:p="http://schemas.openxmlformats.org/presentationml/2006/main">
   <p:cSld>
     <p:spTree>
@@ -15495,7 +15303,7 @@
           <a:p>
             <a:fld id="{75DF2D63-3FF5-D547-96B9-BE9CCD1ABA58}" type="slidenum">
               <a:rPr lang="en-US" smtClean="0"/>
-              <a:t>17</a:t>
+              <a:t>16</a:t>
             </a:fld>
             <a:endParaRPr lang="en-US" dirty="0"/>
           </a:p>
@@ -15662,7 +15470,7 @@
 </p:sld>
 </file>
 
-<file path=ppt/slides/slide18.xml><?xml version="1.0" encoding="utf-8"?>
+<file path=ppt/slides/slide17.xml><?xml version="1.0" encoding="utf-8"?>
 <p:sld xmlns:a="http://schemas.openxmlformats.org/drawingml/2006/main" xmlns:r="http://schemas.openxmlformats.org/officeDocument/2006/relationships" xmlns:p="http://schemas.openxmlformats.org/presentationml/2006/main">
   <p:cSld>
     <p:spTree>
@@ -15736,7 +15544,7 @@
             <a:fld id="{75DF2D63-3FF5-D547-96B9-BE9CCD1ABA58}" type="slidenum">
               <a:rPr lang="en-US" smtClean="0"/>
               <a:pPr/>
-              <a:t>18</a:t>
+              <a:t>17</a:t>
             </a:fld>
             <a:endParaRPr lang="en-US" dirty="0"/>
           </a:p>
@@ -15812,7 +15620,7 @@
 </p:sld>
 </file>
 
-<file path=ppt/slides/slide19.xml><?xml version="1.0" encoding="utf-8"?>
+<file path=ppt/slides/slide18.xml><?xml version="1.0" encoding="utf-8"?>
 <p:sld xmlns:a="http://schemas.openxmlformats.org/drawingml/2006/main" xmlns:r="http://schemas.openxmlformats.org/officeDocument/2006/relationships" xmlns:p="http://schemas.openxmlformats.org/presentationml/2006/main">
   <p:cSld>
     <p:spTree>
@@ -15859,7 +15667,7 @@
             <a:fld id="{75DF2D63-3FF5-D547-96B9-BE9CCD1ABA58}" type="slidenum">
               <a:rPr lang="en-US" smtClean="0"/>
               <a:pPr/>
-              <a:t>19</a:t>
+              <a:t>18</a:t>
             </a:fld>
             <a:endParaRPr lang="en-US" dirty="0"/>
           </a:p>
@@ -16111,6 +15919,237 @@
     <p:extLst>
       <p:ext uri="{BB962C8B-B14F-4D97-AF65-F5344CB8AC3E}">
         <p14:creationId xmlns:p14="http://schemas.microsoft.com/office/powerpoint/2010/main" val="954565115"/>
+      </p:ext>
+    </p:extLst>
+  </p:cSld>
+  <p:clrMapOvr>
+    <a:masterClrMapping/>
+  </p:clrMapOvr>
+</p:sld>
+</file>
+
+<file path=ppt/slides/slide19.xml><?xml version="1.0" encoding="utf-8"?>
+<p:sld xmlns:a="http://schemas.openxmlformats.org/drawingml/2006/main" xmlns:r="http://schemas.openxmlformats.org/officeDocument/2006/relationships" xmlns:p="http://schemas.openxmlformats.org/presentationml/2006/main">
+  <p:cSld>
+    <p:spTree>
+      <p:nvGrpSpPr>
+        <p:cNvPr id="1" name="">
+          <a:extLst>
+            <a:ext uri="{FF2B5EF4-FFF2-40B4-BE49-F238E27FC236}">
+              <a16:creationId xmlns:a16="http://schemas.microsoft.com/office/drawing/2014/main" id="{0FAF68E6-4AD0-7CDA-AC9E-4EF4B0295923}"/>
+            </a:ext>
+          </a:extLst>
+        </p:cNvPr>
+        <p:cNvGrpSpPr/>
+        <p:nvPr/>
+      </p:nvGrpSpPr>
+      <p:grpSpPr>
+        <a:xfrm>
+          <a:off x="0" y="0"/>
+          <a:ext cx="0" cy="0"/>
+          <a:chOff x="0" y="0"/>
+          <a:chExt cx="0" cy="0"/>
+        </a:xfrm>
+      </p:grpSpPr>
+      <p:sp>
+        <p:nvSpPr>
+          <p:cNvPr id="4" name="Slide Number Placeholder 3">
+            <a:extLst>
+              <a:ext uri="{FF2B5EF4-FFF2-40B4-BE49-F238E27FC236}">
+                <a16:creationId xmlns:a16="http://schemas.microsoft.com/office/drawing/2014/main" id="{69881DA5-76B7-FE11-1C52-A2D50B3D83CE}"/>
+              </a:ext>
+            </a:extLst>
+          </p:cNvPr>
+          <p:cNvSpPr>
+            <a:spLocks noGrp="1"/>
+          </p:cNvSpPr>
+          <p:nvPr>
+            <p:ph type="sldNum" sz="quarter" idx="11"/>
+          </p:nvPr>
+        </p:nvSpPr>
+        <p:spPr/>
+        <p:txBody>
+          <a:bodyPr/>
+          <a:lstStyle/>
+          <a:p>
+            <a:fld id="{75DF2D63-3FF5-D547-96B9-BE9CCD1ABA58}" type="slidenum">
+              <a:rPr lang="en-US" smtClean="0"/>
+              <a:pPr/>
+              <a:t>19</a:t>
+            </a:fld>
+            <a:endParaRPr lang="en-US" dirty="0"/>
+          </a:p>
+        </p:txBody>
+      </p:sp>
+      <p:sp>
+        <p:nvSpPr>
+          <p:cNvPr id="17" name="TextBox 16">
+            <a:extLst>
+              <a:ext uri="{FF2B5EF4-FFF2-40B4-BE49-F238E27FC236}">
+                <a16:creationId xmlns:a16="http://schemas.microsoft.com/office/drawing/2014/main" id="{6AF803B0-A16D-FE72-1847-CF8DF07CC395}"/>
+              </a:ext>
+            </a:extLst>
+          </p:cNvPr>
+          <p:cNvSpPr txBox="1"/>
+          <p:nvPr/>
+        </p:nvSpPr>
+        <p:spPr>
+          <a:xfrm>
+            <a:off x="649224" y="859614"/>
+            <a:ext cx="6171454" cy="594137"/>
+          </a:xfrm>
+          <a:prstGeom prst="rect">
+            <a:avLst/>
+          </a:prstGeom>
+          <a:noFill/>
+        </p:spPr>
+        <p:txBody>
+          <a:bodyPr wrap="square">
+            <a:spAutoFit/>
+          </a:bodyPr>
+          <a:lstStyle/>
+          <a:p>
+            <a:pPr marR="0" lvl="0" algn="l" defTabSz="914400" rtl="0" eaLnBrk="1" fontAlgn="auto" latinLnBrk="0" hangingPunct="1">
+              <a:lnSpc>
+                <a:spcPct val="90000"/>
+              </a:lnSpc>
+              <a:spcBef>
+                <a:spcPts val="1000"/>
+              </a:spcBef>
+              <a:spcAft>
+                <a:spcPts val="0"/>
+              </a:spcAft>
+              <a:buClrTx/>
+              <a:buSzTx/>
+              <a:tabLst/>
+              <a:defRPr/>
+            </a:pPr>
+            <a:r>
+              <a:rPr lang="en-US" sz="3600" dirty="0">
+                <a:solidFill>
+                  <a:prstClr val="black"/>
+                </a:solidFill>
+                <a:latin typeface="Aptos" panose="020B0004020202020204" pitchFamily="34" charset="0"/>
+                <a:ea typeface="Open Sans Semibold" panose="020B0706030804020204" pitchFamily="34" charset="0"/>
+                <a:cs typeface="Open Sans Semibold" panose="020B0706030804020204" pitchFamily="34" charset="0"/>
+              </a:rPr>
+              <a:t>REFERENCES</a:t>
+            </a:r>
+            <a:endParaRPr kumimoji="0" lang="en-US" sz="3600" i="0" u="none" strike="noStrike" kern="1200" cap="none" spc="0" normalizeH="0" baseline="0" noProof="0" dirty="0">
+              <a:ln>
+                <a:noFill/>
+              </a:ln>
+              <a:solidFill>
+                <a:prstClr val="black"/>
+              </a:solidFill>
+              <a:effectLst/>
+              <a:uLnTx/>
+              <a:uFillTx/>
+              <a:latin typeface="Aptos" panose="020B0004020202020204" pitchFamily="34" charset="0"/>
+              <a:ea typeface="Open Sans Semibold" panose="020B0706030804020204" pitchFamily="34" charset="0"/>
+              <a:cs typeface="Open Sans Semibold" panose="020B0706030804020204" pitchFamily="34" charset="0"/>
+            </a:endParaRPr>
+          </a:p>
+        </p:txBody>
+      </p:sp>
+      <p:sp>
+        <p:nvSpPr>
+          <p:cNvPr id="3" name="TextBox 2">
+            <a:extLst>
+              <a:ext uri="{FF2B5EF4-FFF2-40B4-BE49-F238E27FC236}">
+                <a16:creationId xmlns:a16="http://schemas.microsoft.com/office/drawing/2014/main" id="{590B0EE1-E87F-A0D6-7678-814BA2856EA0}"/>
+              </a:ext>
+            </a:extLst>
+          </p:cNvPr>
+          <p:cNvSpPr txBox="1"/>
+          <p:nvPr/>
+        </p:nvSpPr>
+        <p:spPr>
+          <a:xfrm>
+            <a:off x="877824" y="1983475"/>
+            <a:ext cx="10807181" cy="3506601"/>
+          </a:xfrm>
+          <a:prstGeom prst="rect">
+            <a:avLst/>
+          </a:prstGeom>
+          <a:noFill/>
+        </p:spPr>
+        <p:txBody>
+          <a:bodyPr wrap="square">
+            <a:spAutoFit/>
+          </a:bodyPr>
+          <a:lstStyle/>
+          <a:p>
+            <a:r>
+              <a:rPr lang="en-IN" sz="1600" dirty="0">
+                <a:latin typeface="Calibri" panose="020F0502020204030204" pitchFamily="34" charset="0"/>
+                <a:ea typeface="Calibri" panose="020F0502020204030204" pitchFamily="34" charset="0"/>
+                <a:cs typeface="Calibri" panose="020F0502020204030204" pitchFamily="34" charset="0"/>
+              </a:rPr>
+              <a:t>[7] A. J. M. O. R. Khan, S. A. M. Islam, A. Sarkar, T. Islam, R. Paul, and M. S. Bari, “Real-Time Predictive Health Monitoring Using AI-Driven Wearable Sensors: Enhancing Early Detection and Personalized Interventions in Chronic Disease Management,” International Journal of Advanced Computer Science and Applications (IJACSA), vol. 14, no. 9, pp. 123–132, 2023. doi:10.14569/IJACSA.2023.0140915.</a:t>
+            </a:r>
+          </a:p>
+          <a:p>
+            <a:endParaRPr lang="en-IN" sz="1600" dirty="0">
+              <a:latin typeface="Calibri" panose="020F0502020204030204" pitchFamily="34" charset="0"/>
+              <a:ea typeface="Calibri" panose="020F0502020204030204" pitchFamily="34" charset="0"/>
+              <a:cs typeface="Calibri" panose="020F0502020204030204" pitchFamily="34" charset="0"/>
+            </a:endParaRPr>
+          </a:p>
+          <a:p>
+            <a:pPr>
+              <a:lnSpc>
+                <a:spcPct val="115000"/>
+              </a:lnSpc>
+              <a:spcAft>
+                <a:spcPts val="800"/>
+              </a:spcAft>
+            </a:pPr>
+            <a:r>
+              <a:rPr lang="en-IN" sz="1600" dirty="0">
+                <a:latin typeface="Calibri" panose="020F0502020204030204" pitchFamily="34" charset="0"/>
+                <a:ea typeface="Calibri" panose="020F0502020204030204" pitchFamily="34" charset="0"/>
+                <a:cs typeface="Calibri" panose="020F0502020204030204" pitchFamily="34" charset="0"/>
+              </a:rPr>
+              <a:t>[8] R. Parasuraman, H. R. Keshavan, and S. M. P. Raj, “Review of Wearable Devices and Data Collection Considerations for Connected Health,” BioMed Research International, vol. 2021, Article ID 4030249, pp. 1–15, Jan. 2021. doi:10.1155/2021/4030249.</a:t>
+            </a:r>
+          </a:p>
+          <a:p>
+            <a:r>
+              <a:rPr lang="en-IN" sz="1600" dirty="0">
+                <a:latin typeface="Calibri" panose="020F0502020204030204" pitchFamily="34" charset="0"/>
+                <a:ea typeface="Calibri" panose="020F0502020204030204" pitchFamily="34" charset="0"/>
+                <a:cs typeface="Calibri" panose="020F0502020204030204" pitchFamily="34" charset="0"/>
+              </a:rPr>
+              <a:t>[9] J. Ave, “Wearable Device Data Analysis for Health Monitoring and Early Disease Detection,” International Journal of Artificial Intelligence and Machine Learning in Engineering, vol. 8, no. 2, pp. 116–122, Feb. 2008.</a:t>
+            </a:r>
+          </a:p>
+          <a:p>
+            <a:r>
+              <a:rPr lang="en-IN" sz="1600" dirty="0">
+                <a:latin typeface="Calibri" panose="020F0502020204030204" pitchFamily="34" charset="0"/>
+                <a:ea typeface="Calibri" panose="020F0502020204030204" pitchFamily="34" charset="0"/>
+                <a:cs typeface="Calibri" panose="020F0502020204030204" pitchFamily="34" charset="0"/>
+              </a:rPr>
+              <a:t> </a:t>
+            </a:r>
+          </a:p>
+          <a:p>
+            <a:r>
+              <a:rPr lang="en-IN" sz="1600" dirty="0">
+                <a:latin typeface="Calibri" panose="020F0502020204030204" pitchFamily="34" charset="0"/>
+                <a:ea typeface="Calibri" panose="020F0502020204030204" pitchFamily="34" charset="0"/>
+                <a:cs typeface="Calibri" panose="020F0502020204030204" pitchFamily="34" charset="0"/>
+              </a:rPr>
+              <a:t>[10] J. Min, J. Tu, C. Xu, H. Lukas, S. Shin, Y. Yang, S. A. Solomon, D. Mukasa, and W. Gao, “Skin-Interfaced Wearable Sweat Sensors for Precision Medicine,” Chemical Reviews, vol. 123, no. 8, pp. 5049–5138, Apr. 2023. doi:10.1021/acs.chemrev.2c00823.</a:t>
+            </a:r>
+          </a:p>
+        </p:txBody>
+      </p:sp>
+    </p:spTree>
+    <p:extLst>
+      <p:ext uri="{BB962C8B-B14F-4D97-AF65-F5344CB8AC3E}">
+        <p14:creationId xmlns:p14="http://schemas.microsoft.com/office/powerpoint/2010/main" val="1845932598"/>
       </p:ext>
     </p:extLst>
   </p:cSld>
@@ -16752,237 +16791,6 @@
 </file>
 
 <file path=ppt/slides/slide20.xml><?xml version="1.0" encoding="utf-8"?>
-<p:sld xmlns:a="http://schemas.openxmlformats.org/drawingml/2006/main" xmlns:r="http://schemas.openxmlformats.org/officeDocument/2006/relationships" xmlns:p="http://schemas.openxmlformats.org/presentationml/2006/main">
-  <p:cSld>
-    <p:spTree>
-      <p:nvGrpSpPr>
-        <p:cNvPr id="1" name="">
-          <a:extLst>
-            <a:ext uri="{FF2B5EF4-FFF2-40B4-BE49-F238E27FC236}">
-              <a16:creationId xmlns:a16="http://schemas.microsoft.com/office/drawing/2014/main" id="{0FAF68E6-4AD0-7CDA-AC9E-4EF4B0295923}"/>
-            </a:ext>
-          </a:extLst>
-        </p:cNvPr>
-        <p:cNvGrpSpPr/>
-        <p:nvPr/>
-      </p:nvGrpSpPr>
-      <p:grpSpPr>
-        <a:xfrm>
-          <a:off x="0" y="0"/>
-          <a:ext cx="0" cy="0"/>
-          <a:chOff x="0" y="0"/>
-          <a:chExt cx="0" cy="0"/>
-        </a:xfrm>
-      </p:grpSpPr>
-      <p:sp>
-        <p:nvSpPr>
-          <p:cNvPr id="4" name="Slide Number Placeholder 3">
-            <a:extLst>
-              <a:ext uri="{FF2B5EF4-FFF2-40B4-BE49-F238E27FC236}">
-                <a16:creationId xmlns:a16="http://schemas.microsoft.com/office/drawing/2014/main" id="{69881DA5-76B7-FE11-1C52-A2D50B3D83CE}"/>
-              </a:ext>
-            </a:extLst>
-          </p:cNvPr>
-          <p:cNvSpPr>
-            <a:spLocks noGrp="1"/>
-          </p:cNvSpPr>
-          <p:nvPr>
-            <p:ph type="sldNum" sz="quarter" idx="11"/>
-          </p:nvPr>
-        </p:nvSpPr>
-        <p:spPr/>
-        <p:txBody>
-          <a:bodyPr/>
-          <a:lstStyle/>
-          <a:p>
-            <a:fld id="{75DF2D63-3FF5-D547-96B9-BE9CCD1ABA58}" type="slidenum">
-              <a:rPr lang="en-US" smtClean="0"/>
-              <a:pPr/>
-              <a:t>20</a:t>
-            </a:fld>
-            <a:endParaRPr lang="en-US" dirty="0"/>
-          </a:p>
-        </p:txBody>
-      </p:sp>
-      <p:sp>
-        <p:nvSpPr>
-          <p:cNvPr id="17" name="TextBox 16">
-            <a:extLst>
-              <a:ext uri="{FF2B5EF4-FFF2-40B4-BE49-F238E27FC236}">
-                <a16:creationId xmlns:a16="http://schemas.microsoft.com/office/drawing/2014/main" id="{6AF803B0-A16D-FE72-1847-CF8DF07CC395}"/>
-              </a:ext>
-            </a:extLst>
-          </p:cNvPr>
-          <p:cNvSpPr txBox="1"/>
-          <p:nvPr/>
-        </p:nvSpPr>
-        <p:spPr>
-          <a:xfrm>
-            <a:off x="649224" y="859614"/>
-            <a:ext cx="6171454" cy="594137"/>
-          </a:xfrm>
-          <a:prstGeom prst="rect">
-            <a:avLst/>
-          </a:prstGeom>
-          <a:noFill/>
-        </p:spPr>
-        <p:txBody>
-          <a:bodyPr wrap="square">
-            <a:spAutoFit/>
-          </a:bodyPr>
-          <a:lstStyle/>
-          <a:p>
-            <a:pPr marR="0" lvl="0" algn="l" defTabSz="914400" rtl="0" eaLnBrk="1" fontAlgn="auto" latinLnBrk="0" hangingPunct="1">
-              <a:lnSpc>
-                <a:spcPct val="90000"/>
-              </a:lnSpc>
-              <a:spcBef>
-                <a:spcPts val="1000"/>
-              </a:spcBef>
-              <a:spcAft>
-                <a:spcPts val="0"/>
-              </a:spcAft>
-              <a:buClrTx/>
-              <a:buSzTx/>
-              <a:tabLst/>
-              <a:defRPr/>
-            </a:pPr>
-            <a:r>
-              <a:rPr lang="en-US" sz="3600" dirty="0">
-                <a:solidFill>
-                  <a:prstClr val="black"/>
-                </a:solidFill>
-                <a:latin typeface="Aptos" panose="020B0004020202020204" pitchFamily="34" charset="0"/>
-                <a:ea typeface="Open Sans Semibold" panose="020B0706030804020204" pitchFamily="34" charset="0"/>
-                <a:cs typeface="Open Sans Semibold" panose="020B0706030804020204" pitchFamily="34" charset="0"/>
-              </a:rPr>
-              <a:t>REFERENCES</a:t>
-            </a:r>
-            <a:endParaRPr kumimoji="0" lang="en-US" sz="3600" i="0" u="none" strike="noStrike" kern="1200" cap="none" spc="0" normalizeH="0" baseline="0" noProof="0" dirty="0">
-              <a:ln>
-                <a:noFill/>
-              </a:ln>
-              <a:solidFill>
-                <a:prstClr val="black"/>
-              </a:solidFill>
-              <a:effectLst/>
-              <a:uLnTx/>
-              <a:uFillTx/>
-              <a:latin typeface="Aptos" panose="020B0004020202020204" pitchFamily="34" charset="0"/>
-              <a:ea typeface="Open Sans Semibold" panose="020B0706030804020204" pitchFamily="34" charset="0"/>
-              <a:cs typeface="Open Sans Semibold" panose="020B0706030804020204" pitchFamily="34" charset="0"/>
-            </a:endParaRPr>
-          </a:p>
-        </p:txBody>
-      </p:sp>
-      <p:sp>
-        <p:nvSpPr>
-          <p:cNvPr id="3" name="TextBox 2">
-            <a:extLst>
-              <a:ext uri="{FF2B5EF4-FFF2-40B4-BE49-F238E27FC236}">
-                <a16:creationId xmlns:a16="http://schemas.microsoft.com/office/drawing/2014/main" id="{590B0EE1-E87F-A0D6-7678-814BA2856EA0}"/>
-              </a:ext>
-            </a:extLst>
-          </p:cNvPr>
-          <p:cNvSpPr txBox="1"/>
-          <p:nvPr/>
-        </p:nvSpPr>
-        <p:spPr>
-          <a:xfrm>
-            <a:off x="877824" y="1983475"/>
-            <a:ext cx="10807181" cy="3506601"/>
-          </a:xfrm>
-          <a:prstGeom prst="rect">
-            <a:avLst/>
-          </a:prstGeom>
-          <a:noFill/>
-        </p:spPr>
-        <p:txBody>
-          <a:bodyPr wrap="square">
-            <a:spAutoFit/>
-          </a:bodyPr>
-          <a:lstStyle/>
-          <a:p>
-            <a:r>
-              <a:rPr lang="en-IN" sz="1600" dirty="0">
-                <a:latin typeface="Calibri" panose="020F0502020204030204" pitchFamily="34" charset="0"/>
-                <a:ea typeface="Calibri" panose="020F0502020204030204" pitchFamily="34" charset="0"/>
-                <a:cs typeface="Calibri" panose="020F0502020204030204" pitchFamily="34" charset="0"/>
-              </a:rPr>
-              <a:t>[7] A. J. M. O. R. Khan, S. A. M. Islam, A. Sarkar, T. Islam, R. Paul, and M. S. Bari, “Real-Time Predictive Health Monitoring Using AI-Driven Wearable Sensors: Enhancing Early Detection and Personalized Interventions in Chronic Disease Management,” International Journal of Advanced Computer Science and Applications (IJACSA), vol. 14, no. 9, pp. 123–132, 2023. doi:10.14569/IJACSA.2023.0140915.</a:t>
-            </a:r>
-          </a:p>
-          <a:p>
-            <a:endParaRPr lang="en-IN" sz="1600" dirty="0">
-              <a:latin typeface="Calibri" panose="020F0502020204030204" pitchFamily="34" charset="0"/>
-              <a:ea typeface="Calibri" panose="020F0502020204030204" pitchFamily="34" charset="0"/>
-              <a:cs typeface="Calibri" panose="020F0502020204030204" pitchFamily="34" charset="0"/>
-            </a:endParaRPr>
-          </a:p>
-          <a:p>
-            <a:pPr>
-              <a:lnSpc>
-                <a:spcPct val="115000"/>
-              </a:lnSpc>
-              <a:spcAft>
-                <a:spcPts val="800"/>
-              </a:spcAft>
-            </a:pPr>
-            <a:r>
-              <a:rPr lang="en-IN" sz="1600" dirty="0">
-                <a:latin typeface="Calibri" panose="020F0502020204030204" pitchFamily="34" charset="0"/>
-                <a:ea typeface="Calibri" panose="020F0502020204030204" pitchFamily="34" charset="0"/>
-                <a:cs typeface="Calibri" panose="020F0502020204030204" pitchFamily="34" charset="0"/>
-              </a:rPr>
-              <a:t>[8] R. Parasuraman, H. R. Keshavan, and S. M. P. Raj, “Review of Wearable Devices and Data Collection Considerations for Connected Health,” BioMed Research International, vol. 2021, Article ID 4030249, pp. 1–15, Jan. 2021. doi:10.1155/2021/4030249.</a:t>
-            </a:r>
-          </a:p>
-          <a:p>
-            <a:r>
-              <a:rPr lang="en-IN" sz="1600" dirty="0">
-                <a:latin typeface="Calibri" panose="020F0502020204030204" pitchFamily="34" charset="0"/>
-                <a:ea typeface="Calibri" panose="020F0502020204030204" pitchFamily="34" charset="0"/>
-                <a:cs typeface="Calibri" panose="020F0502020204030204" pitchFamily="34" charset="0"/>
-              </a:rPr>
-              <a:t>[9] J. Ave, “Wearable Device Data Analysis for Health Monitoring and Early Disease Detection,” International Journal of Artificial Intelligence and Machine Learning in Engineering, vol. 8, no. 2, pp. 116–122, Feb. 2008.</a:t>
-            </a:r>
-          </a:p>
-          <a:p>
-            <a:r>
-              <a:rPr lang="en-IN" sz="1600" dirty="0">
-                <a:latin typeface="Calibri" panose="020F0502020204030204" pitchFamily="34" charset="0"/>
-                <a:ea typeface="Calibri" panose="020F0502020204030204" pitchFamily="34" charset="0"/>
-                <a:cs typeface="Calibri" panose="020F0502020204030204" pitchFamily="34" charset="0"/>
-              </a:rPr>
-              <a:t> </a:t>
-            </a:r>
-          </a:p>
-          <a:p>
-            <a:r>
-              <a:rPr lang="en-IN" sz="1600" dirty="0">
-                <a:latin typeface="Calibri" panose="020F0502020204030204" pitchFamily="34" charset="0"/>
-                <a:ea typeface="Calibri" panose="020F0502020204030204" pitchFamily="34" charset="0"/>
-                <a:cs typeface="Calibri" panose="020F0502020204030204" pitchFamily="34" charset="0"/>
-              </a:rPr>
-              <a:t>[10] J. Min, J. Tu, C. Xu, H. Lukas, S. Shin, Y. Yang, S. A. Solomon, D. Mukasa, and W. Gao, “Skin-Interfaced Wearable Sweat Sensors for Precision Medicine,” Chemical Reviews, vol. 123, no. 8, pp. 5049–5138, Apr. 2023. doi:10.1021/acs.chemrev.2c00823.</a:t>
-            </a:r>
-          </a:p>
-        </p:txBody>
-      </p:sp>
-    </p:spTree>
-    <p:extLst>
-      <p:ext uri="{BB962C8B-B14F-4D97-AF65-F5344CB8AC3E}">
-        <p14:creationId xmlns:p14="http://schemas.microsoft.com/office/powerpoint/2010/main" val="1845932598"/>
-      </p:ext>
-    </p:extLst>
-  </p:cSld>
-  <p:clrMapOvr>
-    <a:masterClrMapping/>
-  </p:clrMapOvr>
-</p:sld>
-</file>
-
-<file path=ppt/slides/slide21.xml><?xml version="1.0" encoding="utf-8"?>
 <p:sld xmlns:a="http://schemas.openxmlformats.org/drawingml/2006/main" xmlns:r="http://schemas.openxmlformats.org/officeDocument/2006/relationships" xmlns:p="http://schemas.openxmlformats.org/presentationml/2006/main">
   <p:cSld>
     <p:spTree>
@@ -18862,7 +18670,7 @@
                   <a:ea typeface="Calibri" panose="020F0502020204030204" pitchFamily="34" charset="0"/>
                   <a:cs typeface="Calibri" panose="020F0502020204030204" pitchFamily="34" charset="0"/>
                 </a:rPr>
-                <a:t>Evaluation using accuracy and F1-score, confusion matrix analysis, &amp; ONNX-based model export for deployment.</a:t>
+                <a:t>Evaluation using accuracy and F1-score, confusion matrix analysis.</a:t>
               </a:r>
               <a:endParaRPr lang="en-US" dirty="0">
                 <a:latin typeface="Calibri" panose="020F0502020204030204" pitchFamily="34" charset="0"/>
@@ -19821,6 +19629,15 @@
 </file>
 
 <file path=customXml/item1.xml><?xml version="1.0" encoding="utf-8"?>
+<?mso-contentType ?>
+<FormTemplates xmlns="http://schemas.microsoft.com/sharepoint/v3/contenttype/forms">
+  <Display>DocumentLibraryForm</Display>
+  <Edit>DocumentLibraryForm</Edit>
+  <New>DocumentLibraryForm</New>
+</FormTemplates>
+</file>
+
+<file path=customXml/item2.xml><?xml version="1.0" encoding="utf-8"?>
 <p:properties xmlns:p="http://schemas.microsoft.com/office/2006/metadata/properties" xmlns:xsi="http://www.w3.org/2001/XMLSchema-instance" xmlns:pc="http://schemas.microsoft.com/office/infopath/2007/PartnerControls">
   <documentManagement>
     <_ip_UnifiedCompliancePolicyUIAction xmlns="http://schemas.microsoft.com/sharepoint/v3" xsi:nil="true"/>
@@ -19838,15 +19655,6 @@
     <MediaServiceKeyPoints xmlns="71af3243-3dd4-4a8d-8c0d-dd76da1f02a5" xsi:nil="true"/>
   </documentManagement>
 </p:properties>
-</file>
-
-<file path=customXml/item2.xml><?xml version="1.0" encoding="utf-8"?>
-<?mso-contentType ?>
-<FormTemplates xmlns="http://schemas.microsoft.com/sharepoint/v3/contenttype/forms">
-  <Display>DocumentLibraryForm</Display>
-  <Edit>DocumentLibraryForm</Edit>
-  <New>DocumentLibraryForm</New>
-</FormTemplates>
 </file>
 
 <file path=customXml/item3.xml><?xml version="1.0" encoding="utf-8"?>
@@ -20144,6 +19952,14 @@
 </file>
 
 <file path=customXml/itemProps1.xml><?xml version="1.0" encoding="utf-8"?>
+<ds:datastoreItem xmlns:ds="http://schemas.openxmlformats.org/officeDocument/2006/customXml" ds:itemID="{0E8B3377-22F1-4153-96F0-CC2E4BE41C57}">
+  <ds:schemaRefs>
+    <ds:schemaRef ds:uri="http://schemas.microsoft.com/sharepoint/v3/contenttype/forms"/>
+  </ds:schemaRefs>
+</ds:datastoreItem>
+</file>
+
+<file path=customXml/itemProps2.xml><?xml version="1.0" encoding="utf-8"?>
 <ds:datastoreItem xmlns:ds="http://schemas.openxmlformats.org/officeDocument/2006/customXml" ds:itemID="{99746342-5E84-430E-9251-61001F208E7A}">
   <ds:schemaRefs>
     <ds:schemaRef ds:uri="http://schemas.microsoft.com/office/2006/metadata/properties"/>
@@ -20151,14 +19967,6 @@
     <ds:schemaRef ds:uri="http://schemas.microsoft.com/sharepoint/v3"/>
     <ds:schemaRef ds:uri="71af3243-3dd4-4a8d-8c0d-dd76da1f02a5"/>
     <ds:schemaRef ds:uri="230e9df3-be65-4c73-a93b-d1236ebd677e"/>
-  </ds:schemaRefs>
-</ds:datastoreItem>
-</file>
-
-<file path=customXml/itemProps2.xml><?xml version="1.0" encoding="utf-8"?>
-<ds:datastoreItem xmlns:ds="http://schemas.openxmlformats.org/officeDocument/2006/customXml" ds:itemID="{0E8B3377-22F1-4153-96F0-CC2E4BE41C57}">
-  <ds:schemaRefs>
-    <ds:schemaRef ds:uri="http://schemas.microsoft.com/sharepoint/v3/contenttype/forms"/>
   </ds:schemaRefs>
 </ds:datastoreItem>
 </file>
